--- a/Python/Lesson 99 - PCEP/PCEP.pptx
+++ b/Python/Lesson 99 - PCEP/PCEP.pptx
@@ -5,29 +5,28 @@
     <p:sldMasterId id="2147483648" r:id="rId1"/>
   </p:sldMasterIdLst>
   <p:sldIdLst>
-    <p:sldId id="277" r:id="rId2"/>
-    <p:sldId id="256" r:id="rId3"/>
-    <p:sldId id="278" r:id="rId4"/>
-    <p:sldId id="257" r:id="rId5"/>
-    <p:sldId id="258" r:id="rId6"/>
-    <p:sldId id="259" r:id="rId7"/>
-    <p:sldId id="260" r:id="rId8"/>
-    <p:sldId id="261" r:id="rId9"/>
-    <p:sldId id="262" r:id="rId10"/>
-    <p:sldId id="263" r:id="rId11"/>
-    <p:sldId id="264" r:id="rId12"/>
-    <p:sldId id="265" r:id="rId13"/>
-    <p:sldId id="266" r:id="rId14"/>
-    <p:sldId id="267" r:id="rId15"/>
-    <p:sldId id="268" r:id="rId16"/>
-    <p:sldId id="269" r:id="rId17"/>
-    <p:sldId id="270" r:id="rId18"/>
-    <p:sldId id="271" r:id="rId19"/>
-    <p:sldId id="272" r:id="rId20"/>
-    <p:sldId id="273" r:id="rId21"/>
-    <p:sldId id="274" r:id="rId22"/>
-    <p:sldId id="275" r:id="rId23"/>
-    <p:sldId id="276" r:id="rId24"/>
+    <p:sldId id="256" r:id="rId2"/>
+    <p:sldId id="278" r:id="rId3"/>
+    <p:sldId id="257" r:id="rId4"/>
+    <p:sldId id="258" r:id="rId5"/>
+    <p:sldId id="259" r:id="rId6"/>
+    <p:sldId id="260" r:id="rId7"/>
+    <p:sldId id="261" r:id="rId8"/>
+    <p:sldId id="262" r:id="rId9"/>
+    <p:sldId id="263" r:id="rId10"/>
+    <p:sldId id="264" r:id="rId11"/>
+    <p:sldId id="265" r:id="rId12"/>
+    <p:sldId id="266" r:id="rId13"/>
+    <p:sldId id="267" r:id="rId14"/>
+    <p:sldId id="268" r:id="rId15"/>
+    <p:sldId id="269" r:id="rId16"/>
+    <p:sldId id="270" r:id="rId17"/>
+    <p:sldId id="271" r:id="rId18"/>
+    <p:sldId id="272" r:id="rId19"/>
+    <p:sldId id="273" r:id="rId20"/>
+    <p:sldId id="274" r:id="rId21"/>
+    <p:sldId id="275" r:id="rId22"/>
+    <p:sldId id="276" r:id="rId23"/>
   </p:sldIdLst>
   <p:sldSz cx="12192000" cy="6858000"/>
   <p:notesSz cx="6858000" cy="9144000"/>
@@ -126,6 +125,11 @@
       </a:defRPr>
     </a:lvl9pPr>
   </p:defaultTextStyle>
+  <p:extLst>
+    <p:ext uri="{EFAFB233-063F-42B5-8137-9DF3F51BA10A}">
+      <p15:sldGuideLst xmlns:p15="http://schemas.microsoft.com/office/powerpoint/2012/main"/>
+    </p:ext>
+  </p:extLst>
 </p:presentation>
 </file>
 
@@ -276,7 +280,7 @@
           <a:p>
             <a:fld id="{81E8FAD2-C737-407C-85E1-36EBD7897FD4}" type="datetimeFigureOut">
               <a:rPr lang="en-US" smtClean="0"/>
-              <a:t>8/20/2025</a:t>
+              <a:t>7/8/2026</a:t>
             </a:fld>
             <a:endParaRPr lang="en-US"/>
           </a:p>
@@ -474,7 +478,7 @@
           <a:p>
             <a:fld id="{81E8FAD2-C737-407C-85E1-36EBD7897FD4}" type="datetimeFigureOut">
               <a:rPr lang="en-US" smtClean="0"/>
-              <a:t>8/20/2025</a:t>
+              <a:t>7/8/2026</a:t>
             </a:fld>
             <a:endParaRPr lang="en-US"/>
           </a:p>
@@ -682,7 +686,7 @@
           <a:p>
             <a:fld id="{81E8FAD2-C737-407C-85E1-36EBD7897FD4}" type="datetimeFigureOut">
               <a:rPr lang="en-US" smtClean="0"/>
-              <a:t>8/20/2025</a:t>
+              <a:t>7/8/2026</a:t>
             </a:fld>
             <a:endParaRPr lang="en-US"/>
           </a:p>
@@ -880,7 +884,7 @@
           <a:p>
             <a:fld id="{81E8FAD2-C737-407C-85E1-36EBD7897FD4}" type="datetimeFigureOut">
               <a:rPr lang="en-US" smtClean="0"/>
-              <a:t>8/20/2025</a:t>
+              <a:t>7/8/2026</a:t>
             </a:fld>
             <a:endParaRPr lang="en-US"/>
           </a:p>
@@ -1155,7 +1159,7 @@
           <a:p>
             <a:fld id="{81E8FAD2-C737-407C-85E1-36EBD7897FD4}" type="datetimeFigureOut">
               <a:rPr lang="en-US" smtClean="0"/>
-              <a:t>8/20/2025</a:t>
+              <a:t>7/8/2026</a:t>
             </a:fld>
             <a:endParaRPr lang="en-US"/>
           </a:p>
@@ -1420,7 +1424,7 @@
           <a:p>
             <a:fld id="{81E8FAD2-C737-407C-85E1-36EBD7897FD4}" type="datetimeFigureOut">
               <a:rPr lang="en-US" smtClean="0"/>
-              <a:t>8/20/2025</a:t>
+              <a:t>7/8/2026</a:t>
             </a:fld>
             <a:endParaRPr lang="en-US"/>
           </a:p>
@@ -1832,7 +1836,7 @@
           <a:p>
             <a:fld id="{81E8FAD2-C737-407C-85E1-36EBD7897FD4}" type="datetimeFigureOut">
               <a:rPr lang="en-US" smtClean="0"/>
-              <a:t>8/20/2025</a:t>
+              <a:t>7/8/2026</a:t>
             </a:fld>
             <a:endParaRPr lang="en-US"/>
           </a:p>
@@ -1973,7 +1977,7 @@
           <a:p>
             <a:fld id="{81E8FAD2-C737-407C-85E1-36EBD7897FD4}" type="datetimeFigureOut">
               <a:rPr lang="en-US" smtClean="0"/>
-              <a:t>8/20/2025</a:t>
+              <a:t>7/8/2026</a:t>
             </a:fld>
             <a:endParaRPr lang="en-US"/>
           </a:p>
@@ -2086,7 +2090,7 @@
           <a:p>
             <a:fld id="{81E8FAD2-C737-407C-85E1-36EBD7897FD4}" type="datetimeFigureOut">
               <a:rPr lang="en-US" smtClean="0"/>
-              <a:t>8/20/2025</a:t>
+              <a:t>7/8/2026</a:t>
             </a:fld>
             <a:endParaRPr lang="en-US"/>
           </a:p>
@@ -2397,7 +2401,7 @@
           <a:p>
             <a:fld id="{81E8FAD2-C737-407C-85E1-36EBD7897FD4}" type="datetimeFigureOut">
               <a:rPr lang="en-US" smtClean="0"/>
-              <a:t>8/20/2025</a:t>
+              <a:t>7/8/2026</a:t>
             </a:fld>
             <a:endParaRPr lang="en-US"/>
           </a:p>
@@ -2685,7 +2689,7 @@
           <a:p>
             <a:fld id="{81E8FAD2-C737-407C-85E1-36EBD7897FD4}" type="datetimeFigureOut">
               <a:rPr lang="en-US" smtClean="0"/>
-              <a:t>8/20/2025</a:t>
+              <a:t>7/8/2026</a:t>
             </a:fld>
             <a:endParaRPr lang="en-US"/>
           </a:p>
@@ -2926,7 +2930,7 @@
           <a:p>
             <a:fld id="{81E8FAD2-C737-407C-85E1-36EBD7897FD4}" type="datetimeFigureOut">
               <a:rPr lang="en-US" smtClean="0"/>
-              <a:t>8/20/2025</a:t>
+              <a:t>7/8/2026</a:t>
             </a:fld>
             <a:endParaRPr lang="en-US"/>
           </a:p>
@@ -3348,15 +3352,15 @@
           <p:cNvPr id="2" name="Title 1">
             <a:extLst>
               <a:ext uri="{FF2B5EF4-FFF2-40B4-BE49-F238E27FC236}">
-                <a16:creationId xmlns:a16="http://schemas.microsoft.com/office/drawing/2014/main" id="{6ECCDFAA-F686-5819-0F94-2E2F270D2972}"/>
-              </a:ext>
-            </a:extLst>
-          </p:cNvPr>
-          <p:cNvSpPr>
-            <a:spLocks noGrp="1"/>
-          </p:cNvSpPr>
-          <p:nvPr>
-            <p:ph type="title"/>
+                <a16:creationId xmlns:a16="http://schemas.microsoft.com/office/drawing/2014/main" id="{6F0D72D5-9812-0814-0AE8-138F04C7654E}"/>
+              </a:ext>
+            </a:extLst>
+          </p:cNvPr>
+          <p:cNvSpPr>
+            <a:spLocks noGrp="1"/>
+          </p:cNvSpPr>
+          <p:nvPr>
+            <p:ph type="ctrTitle"/>
           </p:nvPr>
         </p:nvSpPr>
         <p:spPr/>
@@ -3366,470 +3370,40 @@
           <a:p>
             <a:r>
               <a:rPr lang="en-US" dirty="0"/>
-              <a:t>Admin</a:t>
-            </a:r>
-          </a:p>
-        </p:txBody>
-      </p:sp>
-      <p:sp>
-        <p:nvSpPr>
-          <p:cNvPr id="3" name="Content Placeholder 2">
-            <a:extLst>
-              <a:ext uri="{FF2B5EF4-FFF2-40B4-BE49-F238E27FC236}">
-                <a16:creationId xmlns:a16="http://schemas.microsoft.com/office/drawing/2014/main" id="{06CD428B-5B20-5DF6-B544-B7B6B11908C3}"/>
-              </a:ext>
-            </a:extLst>
-          </p:cNvPr>
-          <p:cNvSpPr>
-            <a:spLocks noGrp="1"/>
-          </p:cNvSpPr>
-          <p:nvPr>
-            <p:ph idx="1"/>
-          </p:nvPr>
-        </p:nvSpPr>
-        <p:spPr/>
-        <p:txBody>
-          <a:bodyPr>
-            <a:normAutofit lnSpcReduction="10000"/>
-          </a:bodyPr>
-          <a:lstStyle/>
-          <a:p>
-            <a:r>
-              <a:rPr lang="en-US" dirty="0"/>
-              <a:t>Volunteer opportunity, 28-Aug, VA Fisher House (Teams / email)</a:t>
-            </a:r>
-          </a:p>
-          <a:p>
-            <a:endParaRPr lang="en-US" dirty="0"/>
-          </a:p>
-          <a:p>
-            <a:r>
-              <a:rPr lang="en-US" dirty="0"/>
-              <a:t>Weekly / semester schedule posted (Teams)</a:t>
-            </a:r>
-          </a:p>
-          <a:p>
-            <a:endParaRPr lang="en-US" dirty="0"/>
-          </a:p>
-          <a:p>
-            <a:r>
-              <a:rPr lang="en-US" dirty="0"/>
-              <a:t>Updated contact roster (Teams)</a:t>
-            </a:r>
-          </a:p>
-          <a:p>
-            <a:endParaRPr lang="en-US" dirty="0"/>
-          </a:p>
-          <a:p>
-            <a:r>
-              <a:rPr lang="en-US" dirty="0"/>
-              <a:t>Grooming / accountability @ CMU</a:t>
-            </a:r>
-          </a:p>
-          <a:p>
-            <a:endParaRPr lang="en-US" dirty="0"/>
-          </a:p>
-          <a:p>
-            <a:r>
-              <a:rPr lang="en-US"/>
-              <a:t>No ID??</a:t>
-            </a:r>
-            <a:endParaRPr lang="en-US" dirty="0"/>
+              <a:t>Review</a:t>
+            </a:r>
+          </a:p>
+        </p:txBody>
+      </p:sp>
+      <p:sp>
+        <p:nvSpPr>
+          <p:cNvPr id="3" name="Subtitle 2">
+            <a:extLst>
+              <a:ext uri="{FF2B5EF4-FFF2-40B4-BE49-F238E27FC236}">
+                <a16:creationId xmlns:a16="http://schemas.microsoft.com/office/drawing/2014/main" id="{EFEB8EDC-EABE-B72A-4BC2-A810E259E01F}"/>
+              </a:ext>
+            </a:extLst>
+          </p:cNvPr>
+          <p:cNvSpPr>
+            <a:spLocks noGrp="1"/>
+          </p:cNvSpPr>
+          <p:nvPr>
+            <p:ph type="subTitle" idx="1"/>
+          </p:nvPr>
+        </p:nvSpPr>
+        <p:spPr/>
+        <p:txBody>
+          <a:bodyPr/>
+          <a:lstStyle/>
+          <a:p>
+            <a:endParaRPr lang="en-US"/>
           </a:p>
         </p:txBody>
       </p:sp>
     </p:spTree>
     <p:extLst>
       <p:ext uri="{BB962C8B-B14F-4D97-AF65-F5344CB8AC3E}">
-        <p14:creationId xmlns:p14="http://schemas.microsoft.com/office/powerpoint/2010/main" val="3382646344"/>
-      </p:ext>
-    </p:extLst>
-  </p:cSld>
-  <p:clrMapOvr>
-    <a:masterClrMapping/>
-  </p:clrMapOvr>
-  <p:timing>
-    <p:tnLst>
-      <p:par>
-        <p:cTn id="1" dur="indefinite" restart="never" nodeType="tmRoot">
-          <p:childTnLst>
-            <p:seq concurrent="1" nextAc="seek">
-              <p:cTn id="2" dur="indefinite" nodeType="mainSeq">
-                <p:childTnLst>
-                  <p:par>
-                    <p:cTn id="3" fill="hold">
-                      <p:stCondLst>
-                        <p:cond delay="indefinite"/>
-                      </p:stCondLst>
-                      <p:childTnLst>
-                        <p:par>
-                          <p:cTn id="4" fill="hold">
-                            <p:stCondLst>
-                              <p:cond delay="0"/>
-                            </p:stCondLst>
-                            <p:childTnLst>
-                              <p:par>
-                                <p:cTn id="5" presetID="1" presetClass="entr" presetSubtype="0" fill="hold" grpId="0" nodeType="clickEffect">
-                                  <p:stCondLst>
-                                    <p:cond delay="0"/>
-                                  </p:stCondLst>
-                                  <p:childTnLst>
-                                    <p:set>
-                                      <p:cBhvr>
-                                        <p:cTn id="6" dur="1" fill="hold">
-                                          <p:stCondLst>
-                                            <p:cond delay="0"/>
-                                          </p:stCondLst>
-                                        </p:cTn>
-                                        <p:tgtEl>
-                                          <p:spTgt spid="3">
-                                            <p:txEl>
-                                              <p:pRg st="0" end="0"/>
-                                            </p:txEl>
-                                          </p:spTgt>
-                                        </p:tgtEl>
-                                        <p:attrNameLst>
-                                          <p:attrName>style.visibility</p:attrName>
-                                        </p:attrNameLst>
-                                      </p:cBhvr>
-                                      <p:to>
-                                        <p:strVal val="visible"/>
-                                      </p:to>
-                                    </p:set>
-                                  </p:childTnLst>
-                                </p:cTn>
-                              </p:par>
-                            </p:childTnLst>
-                          </p:cTn>
-                        </p:par>
-                      </p:childTnLst>
-                    </p:cTn>
-                  </p:par>
-                  <p:par>
-                    <p:cTn id="7" fill="hold">
-                      <p:stCondLst>
-                        <p:cond delay="indefinite"/>
-                      </p:stCondLst>
-                      <p:childTnLst>
-                        <p:par>
-                          <p:cTn id="8" fill="hold">
-                            <p:stCondLst>
-                              <p:cond delay="0"/>
-                            </p:stCondLst>
-                            <p:childTnLst>
-                              <p:par>
-                                <p:cTn id="9" presetID="1" presetClass="entr" presetSubtype="0" fill="hold" grpId="0" nodeType="clickEffect">
-                                  <p:stCondLst>
-                                    <p:cond delay="0"/>
-                                  </p:stCondLst>
-                                  <p:childTnLst>
-                                    <p:set>
-                                      <p:cBhvr>
-                                        <p:cTn id="10" dur="1" fill="hold">
-                                          <p:stCondLst>
-                                            <p:cond delay="0"/>
-                                          </p:stCondLst>
-                                        </p:cTn>
-                                        <p:tgtEl>
-                                          <p:spTgt spid="3">
-                                            <p:txEl>
-                                              <p:pRg st="2" end="2"/>
-                                            </p:txEl>
-                                          </p:spTgt>
-                                        </p:tgtEl>
-                                        <p:attrNameLst>
-                                          <p:attrName>style.visibility</p:attrName>
-                                        </p:attrNameLst>
-                                      </p:cBhvr>
-                                      <p:to>
-                                        <p:strVal val="visible"/>
-                                      </p:to>
-                                    </p:set>
-                                  </p:childTnLst>
-                                </p:cTn>
-                              </p:par>
-                            </p:childTnLst>
-                          </p:cTn>
-                        </p:par>
-                      </p:childTnLst>
-                    </p:cTn>
-                  </p:par>
-                  <p:par>
-                    <p:cTn id="11" fill="hold">
-                      <p:stCondLst>
-                        <p:cond delay="indefinite"/>
-                      </p:stCondLst>
-                      <p:childTnLst>
-                        <p:par>
-                          <p:cTn id="12" fill="hold">
-                            <p:stCondLst>
-                              <p:cond delay="0"/>
-                            </p:stCondLst>
-                            <p:childTnLst>
-                              <p:par>
-                                <p:cTn id="13" presetID="1" presetClass="entr" presetSubtype="0" fill="hold" grpId="0" nodeType="clickEffect">
-                                  <p:stCondLst>
-                                    <p:cond delay="0"/>
-                                  </p:stCondLst>
-                                  <p:childTnLst>
-                                    <p:set>
-                                      <p:cBhvr>
-                                        <p:cTn id="14" dur="1" fill="hold">
-                                          <p:stCondLst>
-                                            <p:cond delay="0"/>
-                                          </p:stCondLst>
-                                        </p:cTn>
-                                        <p:tgtEl>
-                                          <p:spTgt spid="3">
-                                            <p:txEl>
-                                              <p:pRg st="4" end="4"/>
-                                            </p:txEl>
-                                          </p:spTgt>
-                                        </p:tgtEl>
-                                        <p:attrNameLst>
-                                          <p:attrName>style.visibility</p:attrName>
-                                        </p:attrNameLst>
-                                      </p:cBhvr>
-                                      <p:to>
-                                        <p:strVal val="visible"/>
-                                      </p:to>
-                                    </p:set>
-                                  </p:childTnLst>
-                                </p:cTn>
-                              </p:par>
-                            </p:childTnLst>
-                          </p:cTn>
-                        </p:par>
-                      </p:childTnLst>
-                    </p:cTn>
-                  </p:par>
-                  <p:par>
-                    <p:cTn id="15" fill="hold">
-                      <p:stCondLst>
-                        <p:cond delay="indefinite"/>
-                      </p:stCondLst>
-                      <p:childTnLst>
-                        <p:par>
-                          <p:cTn id="16" fill="hold">
-                            <p:stCondLst>
-                              <p:cond delay="0"/>
-                            </p:stCondLst>
-                            <p:childTnLst>
-                              <p:par>
-                                <p:cTn id="17" presetID="1" presetClass="entr" presetSubtype="0" fill="hold" grpId="0" nodeType="clickEffect">
-                                  <p:stCondLst>
-                                    <p:cond delay="0"/>
-                                  </p:stCondLst>
-                                  <p:childTnLst>
-                                    <p:set>
-                                      <p:cBhvr>
-                                        <p:cTn id="18" dur="1" fill="hold">
-                                          <p:stCondLst>
-                                            <p:cond delay="0"/>
-                                          </p:stCondLst>
-                                        </p:cTn>
-                                        <p:tgtEl>
-                                          <p:spTgt spid="3">
-                                            <p:txEl>
-                                              <p:pRg st="6" end="6"/>
-                                            </p:txEl>
-                                          </p:spTgt>
-                                        </p:tgtEl>
-                                        <p:attrNameLst>
-                                          <p:attrName>style.visibility</p:attrName>
-                                        </p:attrNameLst>
-                                      </p:cBhvr>
-                                      <p:to>
-                                        <p:strVal val="visible"/>
-                                      </p:to>
-                                    </p:set>
-                                  </p:childTnLst>
-                                </p:cTn>
-                              </p:par>
-                            </p:childTnLst>
-                          </p:cTn>
-                        </p:par>
-                      </p:childTnLst>
-                    </p:cTn>
-                  </p:par>
-                  <p:par>
-                    <p:cTn id="19" fill="hold">
-                      <p:stCondLst>
-                        <p:cond delay="indefinite"/>
-                      </p:stCondLst>
-                      <p:childTnLst>
-                        <p:par>
-                          <p:cTn id="20" fill="hold">
-                            <p:stCondLst>
-                              <p:cond delay="0"/>
-                            </p:stCondLst>
-                            <p:childTnLst>
-                              <p:par>
-                                <p:cTn id="21" presetID="1" presetClass="entr" presetSubtype="0" fill="hold" grpId="0" nodeType="clickEffect">
-                                  <p:stCondLst>
-                                    <p:cond delay="0"/>
-                                  </p:stCondLst>
-                                  <p:childTnLst>
-                                    <p:set>
-                                      <p:cBhvr>
-                                        <p:cTn id="22" dur="1" fill="hold">
-                                          <p:stCondLst>
-                                            <p:cond delay="0"/>
-                                          </p:stCondLst>
-                                        </p:cTn>
-                                        <p:tgtEl>
-                                          <p:spTgt spid="3">
-                                            <p:txEl>
-                                              <p:pRg st="8" end="8"/>
-                                            </p:txEl>
-                                          </p:spTgt>
-                                        </p:tgtEl>
-                                        <p:attrNameLst>
-                                          <p:attrName>style.visibility</p:attrName>
-                                        </p:attrNameLst>
-                                      </p:cBhvr>
-                                      <p:to>
-                                        <p:strVal val="visible"/>
-                                      </p:to>
-                                    </p:set>
-                                  </p:childTnLst>
-                                </p:cTn>
-                              </p:par>
-                            </p:childTnLst>
-                          </p:cTn>
-                        </p:par>
-                      </p:childTnLst>
-                    </p:cTn>
-                  </p:par>
-                </p:childTnLst>
-              </p:cTn>
-              <p:prevCondLst>
-                <p:cond evt="onPrev" delay="0">
-                  <p:tgtEl>
-                    <p:sldTgt/>
-                  </p:tgtEl>
-                </p:cond>
-              </p:prevCondLst>
-              <p:nextCondLst>
-                <p:cond evt="onNext" delay="0">
-                  <p:tgtEl>
-                    <p:sldTgt/>
-                  </p:tgtEl>
-                </p:cond>
-              </p:nextCondLst>
-            </p:seq>
-          </p:childTnLst>
-        </p:cTn>
-      </p:par>
-    </p:tnLst>
-    <p:bldLst>
-      <p:bldP spid="3" grpId="0" build="p"/>
-    </p:bldLst>
-  </p:timing>
-</p:sld>
-</file>
-
-<file path=ppt/slides/slide10.xml><?xml version="1.0" encoding="utf-8"?>
-<p:sld xmlns:a="http://schemas.openxmlformats.org/drawingml/2006/main" xmlns:r="http://schemas.openxmlformats.org/officeDocument/2006/relationships" xmlns:p="http://schemas.openxmlformats.org/presentationml/2006/main">
-  <p:cSld>
-    <p:spTree>
-      <p:nvGrpSpPr>
-        <p:cNvPr id="1" name=""/>
-        <p:cNvGrpSpPr/>
-        <p:nvPr/>
-      </p:nvGrpSpPr>
-      <p:grpSpPr>
-        <a:xfrm>
-          <a:off x="0" y="0"/>
-          <a:ext cx="0" cy="0"/>
-          <a:chOff x="0" y="0"/>
-          <a:chExt cx="0" cy="0"/>
-        </a:xfrm>
-      </p:grpSpPr>
-      <p:sp>
-        <p:nvSpPr>
-          <p:cNvPr id="2" name="Title 1">
-            <a:extLst>
-              <a:ext uri="{FF2B5EF4-FFF2-40B4-BE49-F238E27FC236}">
-                <a16:creationId xmlns:a16="http://schemas.microsoft.com/office/drawing/2014/main" id="{EA0E4EB7-7A0C-38DF-BE25-993AF52ABFB1}"/>
-              </a:ext>
-            </a:extLst>
-          </p:cNvPr>
-          <p:cNvSpPr>
-            <a:spLocks noGrp="1"/>
-          </p:cNvSpPr>
-          <p:nvPr>
-            <p:ph type="title"/>
-          </p:nvPr>
-        </p:nvSpPr>
-        <p:spPr/>
-        <p:txBody>
-          <a:bodyPr/>
-          <a:lstStyle/>
-          <a:p>
-            <a:endParaRPr lang="en-US"/>
-          </a:p>
-        </p:txBody>
-      </p:sp>
-      <p:sp>
-        <p:nvSpPr>
-          <p:cNvPr id="3" name="Content Placeholder 2">
-            <a:extLst>
-              <a:ext uri="{FF2B5EF4-FFF2-40B4-BE49-F238E27FC236}">
-                <a16:creationId xmlns:a16="http://schemas.microsoft.com/office/drawing/2014/main" id="{741F2F25-C484-3844-0386-3CBD1C0CF2E0}"/>
-              </a:ext>
-            </a:extLst>
-          </p:cNvPr>
-          <p:cNvSpPr>
-            <a:spLocks noGrp="1"/>
-          </p:cNvSpPr>
-          <p:nvPr>
-            <p:ph idx="1"/>
-          </p:nvPr>
-        </p:nvSpPr>
-        <p:spPr/>
-        <p:txBody>
-          <a:bodyPr/>
-          <a:lstStyle/>
-          <a:p>
-            <a:endParaRPr lang="en-US"/>
-          </a:p>
-        </p:txBody>
-      </p:sp>
-      <p:pic>
-        <p:nvPicPr>
-          <p:cNvPr id="5" name="Picture 4">
-            <a:extLst>
-              <a:ext uri="{FF2B5EF4-FFF2-40B4-BE49-F238E27FC236}">
-                <a16:creationId xmlns:a16="http://schemas.microsoft.com/office/drawing/2014/main" id="{567946D6-FD97-80F8-7E09-4B2AADA09035}"/>
-              </a:ext>
-            </a:extLst>
-          </p:cNvPr>
-          <p:cNvPicPr>
-            <a:picLocks noChangeAspect="1"/>
-          </p:cNvPicPr>
-          <p:nvPr/>
-        </p:nvPicPr>
-        <p:blipFill>
-          <a:blip r:embed="rId2"/>
-          <a:stretch>
-            <a:fillRect/>
-          </a:stretch>
-        </p:blipFill>
-        <p:spPr>
-          <a:xfrm>
-            <a:off x="765398" y="462071"/>
-            <a:ext cx="10515600" cy="5325642"/>
-          </a:xfrm>
-          <a:prstGeom prst="rect">
-            <a:avLst/>
-          </a:prstGeom>
-        </p:spPr>
-      </p:pic>
-    </p:spTree>
-    <p:extLst>
-      <p:ext uri="{BB962C8B-B14F-4D97-AF65-F5344CB8AC3E}">
-        <p14:creationId xmlns:p14="http://schemas.microsoft.com/office/powerpoint/2010/main" val="1122217236"/>
+        <p14:creationId xmlns:p14="http://schemas.microsoft.com/office/powerpoint/2010/main" val="3135462244"/>
       </p:ext>
     </p:extLst>
   </p:cSld>
@@ -3839,7 +3413,7 @@
 </p:sld>
 </file>
 
-<file path=ppt/slides/slide11.xml><?xml version="1.0" encoding="utf-8"?>
+<file path=ppt/slides/slide10.xml><?xml version="1.0" encoding="utf-8"?>
 <p:sld xmlns:a="http://schemas.openxmlformats.org/drawingml/2006/main" xmlns:r="http://schemas.openxmlformats.org/officeDocument/2006/relationships" xmlns:p="http://schemas.openxmlformats.org/presentationml/2006/main">
   <p:cSld>
     <p:spTree>
@@ -3949,7 +3523,7 @@
 </p:sld>
 </file>
 
-<file path=ppt/slides/slide12.xml><?xml version="1.0" encoding="utf-8"?>
+<file path=ppt/slides/slide11.xml><?xml version="1.0" encoding="utf-8"?>
 <p:sld xmlns:a="http://schemas.openxmlformats.org/drawingml/2006/main" xmlns:r="http://schemas.openxmlformats.org/officeDocument/2006/relationships" xmlns:p="http://schemas.openxmlformats.org/presentationml/2006/main">
   <p:cSld>
     <p:spTree>
@@ -4059,7 +3633,7 @@
 </p:sld>
 </file>
 
-<file path=ppt/slides/slide13.xml><?xml version="1.0" encoding="utf-8"?>
+<file path=ppt/slides/slide12.xml><?xml version="1.0" encoding="utf-8"?>
 <p:sld xmlns:a="http://schemas.openxmlformats.org/drawingml/2006/main" xmlns:r="http://schemas.openxmlformats.org/officeDocument/2006/relationships" xmlns:p="http://schemas.openxmlformats.org/presentationml/2006/main">
   <p:cSld>
     <p:spTree>
@@ -4169,7 +3743,7 @@
 </p:sld>
 </file>
 
-<file path=ppt/slides/slide14.xml><?xml version="1.0" encoding="utf-8"?>
+<file path=ppt/slides/slide13.xml><?xml version="1.0" encoding="utf-8"?>
 <p:sld xmlns:a="http://schemas.openxmlformats.org/drawingml/2006/main" xmlns:r="http://schemas.openxmlformats.org/officeDocument/2006/relationships" xmlns:p="http://schemas.openxmlformats.org/presentationml/2006/main">
   <p:cSld>
     <p:spTree>
@@ -4279,7 +3853,7 @@
 </p:sld>
 </file>
 
-<file path=ppt/slides/slide15.xml><?xml version="1.0" encoding="utf-8"?>
+<file path=ppt/slides/slide14.xml><?xml version="1.0" encoding="utf-8"?>
 <p:sld xmlns:a="http://schemas.openxmlformats.org/drawingml/2006/main" xmlns:r="http://schemas.openxmlformats.org/officeDocument/2006/relationships" xmlns:p="http://schemas.openxmlformats.org/presentationml/2006/main">
   <p:cSld>
     <p:spTree>
@@ -4389,7 +3963,7 @@
 </p:sld>
 </file>
 
-<file path=ppt/slides/slide16.xml><?xml version="1.0" encoding="utf-8"?>
+<file path=ppt/slides/slide15.xml><?xml version="1.0" encoding="utf-8"?>
 <p:sld xmlns:a="http://schemas.openxmlformats.org/drawingml/2006/main" xmlns:r="http://schemas.openxmlformats.org/officeDocument/2006/relationships" xmlns:p="http://schemas.openxmlformats.org/presentationml/2006/main">
   <p:cSld>
     <p:spTree>
@@ -4499,7 +4073,7 @@
 </p:sld>
 </file>
 
-<file path=ppt/slides/slide17.xml><?xml version="1.0" encoding="utf-8"?>
+<file path=ppt/slides/slide16.xml><?xml version="1.0" encoding="utf-8"?>
 <p:sld xmlns:a="http://schemas.openxmlformats.org/drawingml/2006/main" xmlns:r="http://schemas.openxmlformats.org/officeDocument/2006/relationships" xmlns:p="http://schemas.openxmlformats.org/presentationml/2006/main">
   <p:cSld>
     <p:spTree>
@@ -4609,7 +4183,7 @@
 </p:sld>
 </file>
 
-<file path=ppt/slides/slide18.xml><?xml version="1.0" encoding="utf-8"?>
+<file path=ppt/slides/slide17.xml><?xml version="1.0" encoding="utf-8"?>
 <p:sld xmlns:a="http://schemas.openxmlformats.org/drawingml/2006/main" xmlns:r="http://schemas.openxmlformats.org/officeDocument/2006/relationships" xmlns:p="http://schemas.openxmlformats.org/presentationml/2006/main">
   <p:cSld>
     <p:spTree>
@@ -4710,6 +4284,76 @@
     <p:extLst>
       <p:ext uri="{BB962C8B-B14F-4D97-AF65-F5344CB8AC3E}">
         <p14:creationId xmlns:p14="http://schemas.microsoft.com/office/powerpoint/2010/main" val="763837600"/>
+      </p:ext>
+    </p:extLst>
+  </p:cSld>
+  <p:clrMapOvr>
+    <a:masterClrMapping/>
+  </p:clrMapOvr>
+</p:sld>
+</file>
+
+<file path=ppt/slides/slide18.xml><?xml version="1.0" encoding="utf-8"?>
+<p:sld xmlns:a="http://schemas.openxmlformats.org/drawingml/2006/main" xmlns:r="http://schemas.openxmlformats.org/officeDocument/2006/relationships" xmlns:p="http://schemas.openxmlformats.org/presentationml/2006/main">
+  <p:cSld>
+    <p:bg>
+      <p:bgPr>
+        <a:solidFill>
+          <a:schemeClr val="bg1"/>
+        </a:solidFill>
+        <a:effectLst/>
+      </p:bgPr>
+    </p:bg>
+    <p:spTree>
+      <p:nvGrpSpPr>
+        <p:cNvPr id="1" name=""/>
+        <p:cNvGrpSpPr/>
+        <p:nvPr/>
+      </p:nvGrpSpPr>
+      <p:grpSpPr>
+        <a:xfrm>
+          <a:off x="0" y="0"/>
+          <a:ext cx="0" cy="0"/>
+          <a:chOff x="0" y="0"/>
+          <a:chExt cx="0" cy="0"/>
+        </a:xfrm>
+      </p:grpSpPr>
+      <p:pic>
+        <p:nvPicPr>
+          <p:cNvPr id="5" name="Content Placeholder 4">
+            <a:extLst>
+              <a:ext uri="{FF2B5EF4-FFF2-40B4-BE49-F238E27FC236}">
+                <a16:creationId xmlns:a16="http://schemas.microsoft.com/office/drawing/2014/main" id="{42FBE11E-64A8-BBD1-A877-A19A850155BE}"/>
+              </a:ext>
+            </a:extLst>
+          </p:cNvPr>
+          <p:cNvPicPr>
+            <a:picLocks noGrp="1" noChangeAspect="1"/>
+          </p:cNvPicPr>
+          <p:nvPr>
+            <p:ph idx="1"/>
+          </p:nvPr>
+        </p:nvPicPr>
+        <p:blipFill>
+          <a:blip r:embed="rId2"/>
+          <a:stretch>
+            <a:fillRect/>
+          </a:stretch>
+        </p:blipFill>
+        <p:spPr>
+          <a:xfrm>
+            <a:off x="643467" y="1070779"/>
+            <a:ext cx="10905066" cy="4716440"/>
+          </a:xfrm>
+          <a:prstGeom prst="rect">
+            <a:avLst/>
+          </a:prstGeom>
+        </p:spPr>
+      </p:pic>
+    </p:spTree>
+    <p:extLst>
+      <p:ext uri="{BB962C8B-B14F-4D97-AF65-F5344CB8AC3E}">
+        <p14:creationId xmlns:p14="http://schemas.microsoft.com/office/powerpoint/2010/main" val="3602086462"/>
       </p:ext>
     </p:extLst>
   </p:cSld>
@@ -4749,7 +4393,7 @@
           <p:cNvPr id="5" name="Content Placeholder 4">
             <a:extLst>
               <a:ext uri="{FF2B5EF4-FFF2-40B4-BE49-F238E27FC236}">
-                <a16:creationId xmlns:a16="http://schemas.microsoft.com/office/drawing/2014/main" id="{42FBE11E-64A8-BBD1-A877-A19A850155BE}"/>
+                <a16:creationId xmlns:a16="http://schemas.microsoft.com/office/drawing/2014/main" id="{F4541D5A-951A-8707-D866-D1254029BEF2}"/>
               </a:ext>
             </a:extLst>
           </p:cNvPr>
@@ -4768,8 +4412,8 @@
         </p:blipFill>
         <p:spPr>
           <a:xfrm>
-            <a:off x="643467" y="1070779"/>
-            <a:ext cx="10905066" cy="4716440"/>
+            <a:off x="643467" y="770890"/>
+            <a:ext cx="10905066" cy="5316218"/>
           </a:xfrm>
           <a:prstGeom prst="rect">
             <a:avLst/>
@@ -4779,7 +4423,7 @@
     </p:spTree>
     <p:extLst>
       <p:ext uri="{BB962C8B-B14F-4D97-AF65-F5344CB8AC3E}">
-        <p14:creationId xmlns:p14="http://schemas.microsoft.com/office/powerpoint/2010/main" val="3602086462"/>
+        <p14:creationId xmlns:p14="http://schemas.microsoft.com/office/powerpoint/2010/main" val="40331779"/>
       </p:ext>
     </p:extLst>
   </p:cSld>
@@ -4811,15 +4455,15 @@
           <p:cNvPr id="2" name="Title 1">
             <a:extLst>
               <a:ext uri="{FF2B5EF4-FFF2-40B4-BE49-F238E27FC236}">
-                <a16:creationId xmlns:a16="http://schemas.microsoft.com/office/drawing/2014/main" id="{6F0D72D5-9812-0814-0AE8-138F04C7654E}"/>
-              </a:ext>
-            </a:extLst>
-          </p:cNvPr>
-          <p:cNvSpPr>
-            <a:spLocks noGrp="1"/>
-          </p:cNvSpPr>
-          <p:nvPr>
-            <p:ph type="ctrTitle"/>
+                <a16:creationId xmlns:a16="http://schemas.microsoft.com/office/drawing/2014/main" id="{74CB98EE-C38E-BA21-4299-9F39E0C798A2}"/>
+              </a:ext>
+            </a:extLst>
+          </p:cNvPr>
+          <p:cNvSpPr>
+            <a:spLocks noGrp="1"/>
+          </p:cNvSpPr>
+          <p:nvPr>
+            <p:ph type="title"/>
           </p:nvPr>
         </p:nvSpPr>
         <p:spPr/>
@@ -4829,40 +4473,139 @@
           <a:p>
             <a:r>
               <a:rPr lang="en-US" dirty="0"/>
-              <a:t>Review</a:t>
-            </a:r>
-          </a:p>
-        </p:txBody>
-      </p:sp>
-      <p:sp>
-        <p:nvSpPr>
-          <p:cNvPr id="3" name="Subtitle 2">
-            <a:extLst>
-              <a:ext uri="{FF2B5EF4-FFF2-40B4-BE49-F238E27FC236}">
-                <a16:creationId xmlns:a16="http://schemas.microsoft.com/office/drawing/2014/main" id="{EFEB8EDC-EABE-B72A-4BC2-A810E259E01F}"/>
-              </a:ext>
-            </a:extLst>
-          </p:cNvPr>
-          <p:cNvSpPr>
-            <a:spLocks noGrp="1"/>
-          </p:cNvSpPr>
-          <p:nvPr>
-            <p:ph type="subTitle" idx="1"/>
-          </p:nvPr>
-        </p:nvSpPr>
-        <p:spPr/>
-        <p:txBody>
-          <a:bodyPr/>
-          <a:lstStyle/>
-          <a:p>
-            <a:endParaRPr lang="en-US"/>
+              <a:t>New Teams!</a:t>
+            </a:r>
+          </a:p>
+        </p:txBody>
+      </p:sp>
+      <p:sp>
+        <p:nvSpPr>
+          <p:cNvPr id="5" name="Text Placeholder 4">
+            <a:extLst>
+              <a:ext uri="{FF2B5EF4-FFF2-40B4-BE49-F238E27FC236}">
+                <a16:creationId xmlns:a16="http://schemas.microsoft.com/office/drawing/2014/main" id="{7338624E-7F8E-70EF-6AB9-B1E07A9C6278}"/>
+              </a:ext>
+            </a:extLst>
+          </p:cNvPr>
+          <p:cNvSpPr>
+            <a:spLocks noGrp="1"/>
+          </p:cNvSpPr>
+          <p:nvPr>
+            <p:ph type="body" idx="1"/>
+          </p:nvPr>
+        </p:nvSpPr>
+        <p:spPr/>
+        <p:txBody>
+          <a:bodyPr/>
+          <a:lstStyle/>
+          <a:p>
+            <a:r>
+              <a:rPr lang="en-US" dirty="0"/>
+              <a:t>Team 1</a:t>
+            </a:r>
+          </a:p>
+        </p:txBody>
+      </p:sp>
+      <p:sp>
+        <p:nvSpPr>
+          <p:cNvPr id="6" name="Content Placeholder 5">
+            <a:extLst>
+              <a:ext uri="{FF2B5EF4-FFF2-40B4-BE49-F238E27FC236}">
+                <a16:creationId xmlns:a16="http://schemas.microsoft.com/office/drawing/2014/main" id="{D4E17669-F068-5F03-1BA2-21A30D1B816E}"/>
+              </a:ext>
+            </a:extLst>
+          </p:cNvPr>
+          <p:cNvSpPr>
+            <a:spLocks noGrp="1"/>
+          </p:cNvSpPr>
+          <p:nvPr>
+            <p:ph sz="half" idx="2"/>
+          </p:nvPr>
+        </p:nvSpPr>
+        <p:spPr/>
+        <p:txBody>
+          <a:bodyPr/>
+          <a:lstStyle/>
+          <a:p>
+            <a:r>
+              <a:rPr lang="en-US" dirty="0"/>
+              <a:t>CPT Rivera</a:t>
+            </a:r>
+          </a:p>
+          <a:p>
+            <a:r>
+              <a:rPr lang="en-US" dirty="0"/>
+              <a:t>CPT Allen </a:t>
+            </a:r>
+          </a:p>
+        </p:txBody>
+      </p:sp>
+      <p:sp>
+        <p:nvSpPr>
+          <p:cNvPr id="7" name="Text Placeholder 6">
+            <a:extLst>
+              <a:ext uri="{FF2B5EF4-FFF2-40B4-BE49-F238E27FC236}">
+                <a16:creationId xmlns:a16="http://schemas.microsoft.com/office/drawing/2014/main" id="{93DE950B-709B-45C7-B1CD-179289595D5F}"/>
+              </a:ext>
+            </a:extLst>
+          </p:cNvPr>
+          <p:cNvSpPr>
+            <a:spLocks noGrp="1"/>
+          </p:cNvSpPr>
+          <p:nvPr>
+            <p:ph type="body" sz="quarter" idx="3"/>
+          </p:nvPr>
+        </p:nvSpPr>
+        <p:spPr/>
+        <p:txBody>
+          <a:bodyPr/>
+          <a:lstStyle/>
+          <a:p>
+            <a:r>
+              <a:rPr lang="en-US" dirty="0"/>
+              <a:t>Team 2</a:t>
+            </a:r>
+          </a:p>
+        </p:txBody>
+      </p:sp>
+      <p:sp>
+        <p:nvSpPr>
+          <p:cNvPr id="8" name="Content Placeholder 7">
+            <a:extLst>
+              <a:ext uri="{FF2B5EF4-FFF2-40B4-BE49-F238E27FC236}">
+                <a16:creationId xmlns:a16="http://schemas.microsoft.com/office/drawing/2014/main" id="{1E18948B-3825-3ACB-1851-A6FE376DCC80}"/>
+              </a:ext>
+            </a:extLst>
+          </p:cNvPr>
+          <p:cNvSpPr>
+            <a:spLocks noGrp="1"/>
+          </p:cNvSpPr>
+          <p:nvPr>
+            <p:ph sz="quarter" idx="4"/>
+          </p:nvPr>
+        </p:nvSpPr>
+        <p:spPr/>
+        <p:txBody>
+          <a:bodyPr/>
+          <a:lstStyle/>
+          <a:p>
+            <a:r>
+              <a:rPr lang="en-US" dirty="0"/>
+              <a:t>CPT Sun</a:t>
+            </a:r>
+          </a:p>
+          <a:p>
+            <a:r>
+              <a:rPr lang="en-US" dirty="0"/>
+              <a:t>1LT Liu</a:t>
+            </a:r>
           </a:p>
         </p:txBody>
       </p:sp>
     </p:spTree>
     <p:extLst>
       <p:ext uri="{BB962C8B-B14F-4D97-AF65-F5344CB8AC3E}">
-        <p14:creationId xmlns:p14="http://schemas.microsoft.com/office/powerpoint/2010/main" val="3135462244"/>
+        <p14:creationId xmlns:p14="http://schemas.microsoft.com/office/powerpoint/2010/main" val="1443364931"/>
       </p:ext>
     </p:extLst>
   </p:cSld>
@@ -4902,7 +4645,7 @@
           <p:cNvPr id="5" name="Content Placeholder 4">
             <a:extLst>
               <a:ext uri="{FF2B5EF4-FFF2-40B4-BE49-F238E27FC236}">
-                <a16:creationId xmlns:a16="http://schemas.microsoft.com/office/drawing/2014/main" id="{F4541D5A-951A-8707-D866-D1254029BEF2}"/>
+                <a16:creationId xmlns:a16="http://schemas.microsoft.com/office/drawing/2014/main" id="{E6B37D98-A29B-5A0C-A65B-713F36C7C655}"/>
               </a:ext>
             </a:extLst>
           </p:cNvPr>
@@ -4921,8 +4664,8 @@
         </p:blipFill>
         <p:spPr>
           <a:xfrm>
-            <a:off x="643467" y="770890"/>
-            <a:ext cx="10905066" cy="5316218"/>
+            <a:off x="2004747" y="643466"/>
+            <a:ext cx="8182506" cy="5571067"/>
           </a:xfrm>
           <a:prstGeom prst="rect">
             <a:avLst/>
@@ -4932,7 +4675,7 @@
     </p:spTree>
     <p:extLst>
       <p:ext uri="{BB962C8B-B14F-4D97-AF65-F5344CB8AC3E}">
-        <p14:creationId xmlns:p14="http://schemas.microsoft.com/office/powerpoint/2010/main" val="40331779"/>
+        <p14:creationId xmlns:p14="http://schemas.microsoft.com/office/powerpoint/2010/main" val="2381640210"/>
       </p:ext>
     </p:extLst>
   </p:cSld>
@@ -4972,76 +4715,6 @@
           <p:cNvPr id="5" name="Content Placeholder 4">
             <a:extLst>
               <a:ext uri="{FF2B5EF4-FFF2-40B4-BE49-F238E27FC236}">
-                <a16:creationId xmlns:a16="http://schemas.microsoft.com/office/drawing/2014/main" id="{E6B37D98-A29B-5A0C-A65B-713F36C7C655}"/>
-              </a:ext>
-            </a:extLst>
-          </p:cNvPr>
-          <p:cNvPicPr>
-            <a:picLocks noGrp="1" noChangeAspect="1"/>
-          </p:cNvPicPr>
-          <p:nvPr>
-            <p:ph idx="1"/>
-          </p:nvPr>
-        </p:nvPicPr>
-        <p:blipFill>
-          <a:blip r:embed="rId2"/>
-          <a:stretch>
-            <a:fillRect/>
-          </a:stretch>
-        </p:blipFill>
-        <p:spPr>
-          <a:xfrm>
-            <a:off x="2004747" y="643466"/>
-            <a:ext cx="8182506" cy="5571067"/>
-          </a:xfrm>
-          <a:prstGeom prst="rect">
-            <a:avLst/>
-          </a:prstGeom>
-        </p:spPr>
-      </p:pic>
-    </p:spTree>
-    <p:extLst>
-      <p:ext uri="{BB962C8B-B14F-4D97-AF65-F5344CB8AC3E}">
-        <p14:creationId xmlns:p14="http://schemas.microsoft.com/office/powerpoint/2010/main" val="2381640210"/>
-      </p:ext>
-    </p:extLst>
-  </p:cSld>
-  <p:clrMapOvr>
-    <a:masterClrMapping/>
-  </p:clrMapOvr>
-</p:sld>
-</file>
-
-<file path=ppt/slides/slide22.xml><?xml version="1.0" encoding="utf-8"?>
-<p:sld xmlns:a="http://schemas.openxmlformats.org/drawingml/2006/main" xmlns:r="http://schemas.openxmlformats.org/officeDocument/2006/relationships" xmlns:p="http://schemas.openxmlformats.org/presentationml/2006/main">
-  <p:cSld>
-    <p:bg>
-      <p:bgPr>
-        <a:solidFill>
-          <a:schemeClr val="bg1"/>
-        </a:solidFill>
-        <a:effectLst/>
-      </p:bgPr>
-    </p:bg>
-    <p:spTree>
-      <p:nvGrpSpPr>
-        <p:cNvPr id="1" name=""/>
-        <p:cNvGrpSpPr/>
-        <p:nvPr/>
-      </p:nvGrpSpPr>
-      <p:grpSpPr>
-        <a:xfrm>
-          <a:off x="0" y="0"/>
-          <a:ext cx="0" cy="0"/>
-          <a:chOff x="0" y="0"/>
-          <a:chExt cx="0" cy="0"/>
-        </a:xfrm>
-      </p:grpSpPr>
-      <p:pic>
-        <p:nvPicPr>
-          <p:cNvPr id="5" name="Content Placeholder 4">
-            <a:extLst>
-              <a:ext uri="{FF2B5EF4-FFF2-40B4-BE49-F238E27FC236}">
                 <a16:creationId xmlns:a16="http://schemas.microsoft.com/office/drawing/2014/main" id="{73E08472-846C-F559-BDD0-FAE225CFE43A}"/>
               </a:ext>
             </a:extLst>
@@ -5082,7 +4755,7 @@
 </p:sld>
 </file>
 
-<file path=ppt/slides/slide23.xml><?xml version="1.0" encoding="utf-8"?>
+<file path=ppt/slides/slide22.xml><?xml version="1.0" encoding="utf-8"?>
 <p:sld xmlns:a="http://schemas.openxmlformats.org/drawingml/2006/main" xmlns:r="http://schemas.openxmlformats.org/officeDocument/2006/relationships" xmlns:p="http://schemas.openxmlformats.org/presentationml/2006/main">
   <p:cSld>
     <p:bg>
@@ -5174,188 +4847,6 @@
           <p:cNvPr id="2" name="Title 1">
             <a:extLst>
               <a:ext uri="{FF2B5EF4-FFF2-40B4-BE49-F238E27FC236}">
-                <a16:creationId xmlns:a16="http://schemas.microsoft.com/office/drawing/2014/main" id="{74CB98EE-C38E-BA21-4299-9F39E0C798A2}"/>
-              </a:ext>
-            </a:extLst>
-          </p:cNvPr>
-          <p:cNvSpPr>
-            <a:spLocks noGrp="1"/>
-          </p:cNvSpPr>
-          <p:nvPr>
-            <p:ph type="title"/>
-          </p:nvPr>
-        </p:nvSpPr>
-        <p:spPr/>
-        <p:txBody>
-          <a:bodyPr/>
-          <a:lstStyle/>
-          <a:p>
-            <a:r>
-              <a:rPr lang="en-US" dirty="0"/>
-              <a:t>New Teams!</a:t>
-            </a:r>
-          </a:p>
-        </p:txBody>
-      </p:sp>
-      <p:sp>
-        <p:nvSpPr>
-          <p:cNvPr id="5" name="Text Placeholder 4">
-            <a:extLst>
-              <a:ext uri="{FF2B5EF4-FFF2-40B4-BE49-F238E27FC236}">
-                <a16:creationId xmlns:a16="http://schemas.microsoft.com/office/drawing/2014/main" id="{7338624E-7F8E-70EF-6AB9-B1E07A9C6278}"/>
-              </a:ext>
-            </a:extLst>
-          </p:cNvPr>
-          <p:cNvSpPr>
-            <a:spLocks noGrp="1"/>
-          </p:cNvSpPr>
-          <p:nvPr>
-            <p:ph type="body" idx="1"/>
-          </p:nvPr>
-        </p:nvSpPr>
-        <p:spPr/>
-        <p:txBody>
-          <a:bodyPr/>
-          <a:lstStyle/>
-          <a:p>
-            <a:r>
-              <a:rPr lang="en-US" dirty="0"/>
-              <a:t>Team 1</a:t>
-            </a:r>
-          </a:p>
-        </p:txBody>
-      </p:sp>
-      <p:sp>
-        <p:nvSpPr>
-          <p:cNvPr id="6" name="Content Placeholder 5">
-            <a:extLst>
-              <a:ext uri="{FF2B5EF4-FFF2-40B4-BE49-F238E27FC236}">
-                <a16:creationId xmlns:a16="http://schemas.microsoft.com/office/drawing/2014/main" id="{D4E17669-F068-5F03-1BA2-21A30D1B816E}"/>
-              </a:ext>
-            </a:extLst>
-          </p:cNvPr>
-          <p:cNvSpPr>
-            <a:spLocks noGrp="1"/>
-          </p:cNvSpPr>
-          <p:nvPr>
-            <p:ph sz="half" idx="2"/>
-          </p:nvPr>
-        </p:nvSpPr>
-        <p:spPr/>
-        <p:txBody>
-          <a:bodyPr/>
-          <a:lstStyle/>
-          <a:p>
-            <a:r>
-              <a:rPr lang="en-US" dirty="0"/>
-              <a:t>CPT Rivera</a:t>
-            </a:r>
-          </a:p>
-          <a:p>
-            <a:r>
-              <a:rPr lang="en-US" dirty="0"/>
-              <a:t>CPT Allen </a:t>
-            </a:r>
-          </a:p>
-        </p:txBody>
-      </p:sp>
-      <p:sp>
-        <p:nvSpPr>
-          <p:cNvPr id="7" name="Text Placeholder 6">
-            <a:extLst>
-              <a:ext uri="{FF2B5EF4-FFF2-40B4-BE49-F238E27FC236}">
-                <a16:creationId xmlns:a16="http://schemas.microsoft.com/office/drawing/2014/main" id="{93DE950B-709B-45C7-B1CD-179289595D5F}"/>
-              </a:ext>
-            </a:extLst>
-          </p:cNvPr>
-          <p:cNvSpPr>
-            <a:spLocks noGrp="1"/>
-          </p:cNvSpPr>
-          <p:nvPr>
-            <p:ph type="body" sz="quarter" idx="3"/>
-          </p:nvPr>
-        </p:nvSpPr>
-        <p:spPr/>
-        <p:txBody>
-          <a:bodyPr/>
-          <a:lstStyle/>
-          <a:p>
-            <a:r>
-              <a:rPr lang="en-US" dirty="0"/>
-              <a:t>Team 2</a:t>
-            </a:r>
-          </a:p>
-        </p:txBody>
-      </p:sp>
-      <p:sp>
-        <p:nvSpPr>
-          <p:cNvPr id="8" name="Content Placeholder 7">
-            <a:extLst>
-              <a:ext uri="{FF2B5EF4-FFF2-40B4-BE49-F238E27FC236}">
-                <a16:creationId xmlns:a16="http://schemas.microsoft.com/office/drawing/2014/main" id="{1E18948B-3825-3ACB-1851-A6FE376DCC80}"/>
-              </a:ext>
-            </a:extLst>
-          </p:cNvPr>
-          <p:cNvSpPr>
-            <a:spLocks noGrp="1"/>
-          </p:cNvSpPr>
-          <p:nvPr>
-            <p:ph sz="quarter" idx="4"/>
-          </p:nvPr>
-        </p:nvSpPr>
-        <p:spPr/>
-        <p:txBody>
-          <a:bodyPr/>
-          <a:lstStyle/>
-          <a:p>
-            <a:r>
-              <a:rPr lang="en-US" dirty="0"/>
-              <a:t>CPT Sun</a:t>
-            </a:r>
-          </a:p>
-          <a:p>
-            <a:r>
-              <a:rPr lang="en-US" dirty="0"/>
-              <a:t>1LT Liu</a:t>
-            </a:r>
-          </a:p>
-        </p:txBody>
-      </p:sp>
-    </p:spTree>
-    <p:extLst>
-      <p:ext uri="{BB962C8B-B14F-4D97-AF65-F5344CB8AC3E}">
-        <p14:creationId xmlns:p14="http://schemas.microsoft.com/office/powerpoint/2010/main" val="1443364931"/>
-      </p:ext>
-    </p:extLst>
-  </p:cSld>
-  <p:clrMapOvr>
-    <a:masterClrMapping/>
-  </p:clrMapOvr>
-</p:sld>
-</file>
-
-<file path=ppt/slides/slide4.xml><?xml version="1.0" encoding="utf-8"?>
-<p:sld xmlns:a="http://schemas.openxmlformats.org/drawingml/2006/main" xmlns:r="http://schemas.openxmlformats.org/officeDocument/2006/relationships" xmlns:p="http://schemas.openxmlformats.org/presentationml/2006/main">
-  <p:cSld>
-    <p:spTree>
-      <p:nvGrpSpPr>
-        <p:cNvPr id="1" name=""/>
-        <p:cNvGrpSpPr/>
-        <p:nvPr/>
-      </p:nvGrpSpPr>
-      <p:grpSpPr>
-        <a:xfrm>
-          <a:off x="0" y="0"/>
-          <a:ext cx="0" cy="0"/>
-          <a:chOff x="0" y="0"/>
-          <a:chExt cx="0" cy="0"/>
-        </a:xfrm>
-      </p:grpSpPr>
-      <p:sp>
-        <p:nvSpPr>
-          <p:cNvPr id="2" name="Title 1">
-            <a:extLst>
-              <a:ext uri="{FF2B5EF4-FFF2-40B4-BE49-F238E27FC236}">
                 <a16:creationId xmlns:a16="http://schemas.microsoft.com/office/drawing/2014/main" id="{C3AB6F4B-7D23-4BEE-0560-3A87651A2629}"/>
               </a:ext>
             </a:extLst>
@@ -5421,7 +4912,7 @@
 </p:sld>
 </file>
 
-<file path=ppt/slides/slide5.xml><?xml version="1.0" encoding="utf-8"?>
+<file path=ppt/slides/slide4.xml><?xml version="1.0" encoding="utf-8"?>
 <p:sld xmlns:a="http://schemas.openxmlformats.org/drawingml/2006/main" xmlns:r="http://schemas.openxmlformats.org/officeDocument/2006/relationships" xmlns:p="http://schemas.openxmlformats.org/presentationml/2006/main">
   <p:cSld>
     <p:bg>
@@ -5647,7 +5138,7 @@
 </p:sld>
 </file>
 
-<file path=ppt/slides/slide6.xml><?xml version="1.0" encoding="utf-8"?>
+<file path=ppt/slides/slide5.xml><?xml version="1.0" encoding="utf-8"?>
 <p:sld xmlns:a="http://schemas.openxmlformats.org/drawingml/2006/main" xmlns:r="http://schemas.openxmlformats.org/officeDocument/2006/relationships" xmlns:p="http://schemas.openxmlformats.org/presentationml/2006/main">
   <p:cSld>
     <p:bg>
@@ -5873,7 +5364,7 @@
 </p:sld>
 </file>
 
-<file path=ppt/slides/slide7.xml><?xml version="1.0" encoding="utf-8"?>
+<file path=ppt/slides/slide6.xml><?xml version="1.0" encoding="utf-8"?>
 <p:sld xmlns:a="http://schemas.openxmlformats.org/drawingml/2006/main" xmlns:r="http://schemas.openxmlformats.org/officeDocument/2006/relationships" xmlns:p="http://schemas.openxmlformats.org/presentationml/2006/main">
   <p:cSld>
     <p:bg>
@@ -6099,7 +5590,7 @@
 </p:sld>
 </file>
 
-<file path=ppt/slides/slide8.xml><?xml version="1.0" encoding="utf-8"?>
+<file path=ppt/slides/slide7.xml><?xml version="1.0" encoding="utf-8"?>
 <p:sld xmlns:a="http://schemas.openxmlformats.org/drawingml/2006/main" xmlns:r="http://schemas.openxmlformats.org/officeDocument/2006/relationships" xmlns:p="http://schemas.openxmlformats.org/presentationml/2006/main">
   <p:cSld>
     <p:spTree>
@@ -6186,7 +5677,7 @@
 </p:sld>
 </file>
 
-<file path=ppt/slides/slide9.xml><?xml version="1.0" encoding="utf-8"?>
+<file path=ppt/slides/slide8.xml><?xml version="1.0" encoding="utf-8"?>
 <p:sld xmlns:a="http://schemas.openxmlformats.org/drawingml/2006/main" xmlns:r="http://schemas.openxmlformats.org/officeDocument/2006/relationships" xmlns:p="http://schemas.openxmlformats.org/presentationml/2006/main">
   <p:cSld>
     <p:spTree>
@@ -6287,6 +5778,116 @@
     <p:extLst>
       <p:ext uri="{BB962C8B-B14F-4D97-AF65-F5344CB8AC3E}">
         <p14:creationId xmlns:p14="http://schemas.microsoft.com/office/powerpoint/2010/main" val="2624315316"/>
+      </p:ext>
+    </p:extLst>
+  </p:cSld>
+  <p:clrMapOvr>
+    <a:masterClrMapping/>
+  </p:clrMapOvr>
+</p:sld>
+</file>
+
+<file path=ppt/slides/slide9.xml><?xml version="1.0" encoding="utf-8"?>
+<p:sld xmlns:a="http://schemas.openxmlformats.org/drawingml/2006/main" xmlns:r="http://schemas.openxmlformats.org/officeDocument/2006/relationships" xmlns:p="http://schemas.openxmlformats.org/presentationml/2006/main">
+  <p:cSld>
+    <p:spTree>
+      <p:nvGrpSpPr>
+        <p:cNvPr id="1" name=""/>
+        <p:cNvGrpSpPr/>
+        <p:nvPr/>
+      </p:nvGrpSpPr>
+      <p:grpSpPr>
+        <a:xfrm>
+          <a:off x="0" y="0"/>
+          <a:ext cx="0" cy="0"/>
+          <a:chOff x="0" y="0"/>
+          <a:chExt cx="0" cy="0"/>
+        </a:xfrm>
+      </p:grpSpPr>
+      <p:sp>
+        <p:nvSpPr>
+          <p:cNvPr id="2" name="Title 1">
+            <a:extLst>
+              <a:ext uri="{FF2B5EF4-FFF2-40B4-BE49-F238E27FC236}">
+                <a16:creationId xmlns:a16="http://schemas.microsoft.com/office/drawing/2014/main" id="{EA0E4EB7-7A0C-38DF-BE25-993AF52ABFB1}"/>
+              </a:ext>
+            </a:extLst>
+          </p:cNvPr>
+          <p:cNvSpPr>
+            <a:spLocks noGrp="1"/>
+          </p:cNvSpPr>
+          <p:nvPr>
+            <p:ph type="title"/>
+          </p:nvPr>
+        </p:nvSpPr>
+        <p:spPr/>
+        <p:txBody>
+          <a:bodyPr/>
+          <a:lstStyle/>
+          <a:p>
+            <a:endParaRPr lang="en-US"/>
+          </a:p>
+        </p:txBody>
+      </p:sp>
+      <p:sp>
+        <p:nvSpPr>
+          <p:cNvPr id="3" name="Content Placeholder 2">
+            <a:extLst>
+              <a:ext uri="{FF2B5EF4-FFF2-40B4-BE49-F238E27FC236}">
+                <a16:creationId xmlns:a16="http://schemas.microsoft.com/office/drawing/2014/main" id="{741F2F25-C484-3844-0386-3CBD1C0CF2E0}"/>
+              </a:ext>
+            </a:extLst>
+          </p:cNvPr>
+          <p:cNvSpPr>
+            <a:spLocks noGrp="1"/>
+          </p:cNvSpPr>
+          <p:nvPr>
+            <p:ph idx="1"/>
+          </p:nvPr>
+        </p:nvSpPr>
+        <p:spPr/>
+        <p:txBody>
+          <a:bodyPr/>
+          <a:lstStyle/>
+          <a:p>
+            <a:endParaRPr lang="en-US"/>
+          </a:p>
+        </p:txBody>
+      </p:sp>
+      <p:pic>
+        <p:nvPicPr>
+          <p:cNvPr id="5" name="Picture 4">
+            <a:extLst>
+              <a:ext uri="{FF2B5EF4-FFF2-40B4-BE49-F238E27FC236}">
+                <a16:creationId xmlns:a16="http://schemas.microsoft.com/office/drawing/2014/main" id="{567946D6-FD97-80F8-7E09-4B2AADA09035}"/>
+              </a:ext>
+            </a:extLst>
+          </p:cNvPr>
+          <p:cNvPicPr>
+            <a:picLocks noChangeAspect="1"/>
+          </p:cNvPicPr>
+          <p:nvPr/>
+        </p:nvPicPr>
+        <p:blipFill>
+          <a:blip r:embed="rId2"/>
+          <a:stretch>
+            <a:fillRect/>
+          </a:stretch>
+        </p:blipFill>
+        <p:spPr>
+          <a:xfrm>
+            <a:off x="765398" y="462071"/>
+            <a:ext cx="10515600" cy="5325642"/>
+          </a:xfrm>
+          <a:prstGeom prst="rect">
+            <a:avLst/>
+          </a:prstGeom>
+        </p:spPr>
+      </p:pic>
+    </p:spTree>
+    <p:extLst>
+      <p:ext uri="{BB962C8B-B14F-4D97-AF65-F5344CB8AC3E}">
+        <p14:creationId xmlns:p14="http://schemas.microsoft.com/office/powerpoint/2010/main" val="1122217236"/>
       </p:ext>
     </p:extLst>
   </p:cSld>
